--- a/wrigglets-illustrations.pptx
+++ b/wrigglets-illustrations.pptx
@@ -3482,7 +3482,7 @@
                   <a:schemeClr val="tx1"/>
                 </a:solidFill>
               </a:rPr>
-              <a:t>Context-aware</a:t>
+              <a:t>Harness + context-aware</a:t>
             </a:r>
           </a:p>
           <a:p>
@@ -3493,7 +3493,7 @@
                   <a:schemeClr val="tx1"/>
                 </a:solidFill>
               </a:rPr>
-              <a:t>Multi-turn prompt injection analysis</a:t>
+              <a:t>multi-turn prompt injection analysis</a:t>
             </a:r>
           </a:p>
         </p:txBody>
@@ -3585,7 +3585,7 @@
         <p:spPr>
           <a:xfrm>
             <a:off x="2372397" y="5195763"/>
-            <a:ext cx="3028230" cy="1499833"/>
+            <a:ext cx="3028230" cy="589595"/>
           </a:xfrm>
           <a:prstGeom prst="rect">
             <a:avLst/>
@@ -3630,7 +3630,7 @@
                   </a:schemeClr>
                 </a:solidFill>
               </a:rPr>
-              <a:t>MCP Servers</a:t>
+              <a:t>Your MCP Servers</a:t>
             </a:r>
           </a:p>
         </p:txBody>
@@ -3957,7 +3957,7 @@
         <p:spPr>
           <a:xfrm>
             <a:off x="6103393" y="4403755"/>
-            <a:ext cx="2509246" cy="792008"/>
+            <a:ext cx="2509246" cy="377601"/>
           </a:xfrm>
           <a:prstGeom prst="rect">
             <a:avLst/>
@@ -4068,8 +4068,8 @@
         </p:nvSpPr>
         <p:spPr>
           <a:xfrm>
-            <a:off x="6103393" y="5366362"/>
-            <a:ext cx="2509246" cy="589595"/>
+            <a:off x="6103392" y="4833572"/>
+            <a:ext cx="2501853" cy="354861"/>
           </a:xfrm>
           <a:prstGeom prst="rect">
             <a:avLst/>
@@ -4124,8 +4124,8 @@
         </p:nvSpPr>
         <p:spPr>
           <a:xfrm>
-            <a:off x="6103393" y="6106001"/>
-            <a:ext cx="2509246" cy="589595"/>
+            <a:off x="6103393" y="5257367"/>
+            <a:ext cx="2509246" cy="527991"/>
           </a:xfrm>
           <a:prstGeom prst="rect">
             <a:avLst/>
@@ -4301,8 +4301,8 @@
         </p:nvSpPr>
         <p:spPr>
           <a:xfrm>
-            <a:off x="1020315" y="235918"/>
-            <a:ext cx="1696995" cy="646331"/>
+            <a:off x="705711" y="509834"/>
+            <a:ext cx="1563589" cy="923330"/>
           </a:xfrm>
           <a:prstGeom prst="rect">
             <a:avLst/>
@@ -4317,7 +4317,7 @@
           <a:p>
             <a:r>
               <a:rPr lang="de-DE"/>
-              <a:t>While they play...</a:t>
+              <a:t>While your agents are at play...</a:t>
             </a:r>
           </a:p>
         </p:txBody>
@@ -4336,8 +4336,8 @@
         </p:nvSpPr>
         <p:spPr>
           <a:xfrm>
-            <a:off x="8939117" y="5117104"/>
-            <a:ext cx="1957663" cy="923330"/>
+            <a:off x="8886011" y="4889868"/>
+            <a:ext cx="1867184" cy="923330"/>
           </a:xfrm>
           <a:prstGeom prst="rect">
             <a:avLst/>
@@ -4353,6 +4353,123 @@
             <a:r>
               <a:rPr lang="de-DE"/>
               <a:t>...some other guys must watch &amp; protect.</a:t>
+            </a:r>
+          </a:p>
+        </p:txBody>
+      </p:sp>
+      <p:sp>
+        <p:nvSpPr>
+          <p:cNvPr id="29" name="Textfeld 28">
+            <a:extLst>
+              <a:ext uri="{FF2B5EF4-FFF2-40B4-BE49-F238E27FC236}">
+                <a16:creationId xmlns:a16="http://schemas.microsoft.com/office/drawing/2014/main" id="{DA997235-5E6B-A222-2DD4-0A8B7F1A9EFC}"/>
+              </a:ext>
+            </a:extLst>
+          </p:cNvPr>
+          <p:cNvSpPr txBox="1"/>
+          <p:nvPr/>
+        </p:nvSpPr>
+        <p:spPr>
+          <a:xfrm>
+            <a:off x="1367382" y="3216603"/>
+            <a:ext cx="1102659" cy="461665"/>
+          </a:xfrm>
+          <a:prstGeom prst="rect">
+            <a:avLst/>
+          </a:prstGeom>
+          <a:noFill/>
+        </p:spPr>
+        <p:txBody>
+          <a:bodyPr wrap="square" rtlCol="0">
+            <a:spAutoFit/>
+          </a:bodyPr>
+          <a:lstStyle/>
+          <a:p>
+            <a:r>
+              <a:rPr lang="de-DE" sz="1200" b="1">
+                <a:solidFill>
+                  <a:srgbClr val="FF0000"/>
+                </a:solidFill>
+              </a:rPr>
+              <a:t>OpenCode SDK</a:t>
+            </a:r>
+          </a:p>
+        </p:txBody>
+      </p:sp>
+      <p:sp>
+        <p:nvSpPr>
+          <p:cNvPr id="30" name="Textfeld 29">
+            <a:extLst>
+              <a:ext uri="{FF2B5EF4-FFF2-40B4-BE49-F238E27FC236}">
+                <a16:creationId xmlns:a16="http://schemas.microsoft.com/office/drawing/2014/main" id="{6FCEC165-E5EC-1F84-812A-6C7099E4A2BE}"/>
+              </a:ext>
+            </a:extLst>
+          </p:cNvPr>
+          <p:cNvSpPr txBox="1"/>
+          <p:nvPr/>
+        </p:nvSpPr>
+        <p:spPr>
+          <a:xfrm>
+            <a:off x="9175244" y="1201304"/>
+            <a:ext cx="1102659" cy="276999"/>
+          </a:xfrm>
+          <a:prstGeom prst="rect">
+            <a:avLst/>
+          </a:prstGeom>
+          <a:noFill/>
+        </p:spPr>
+        <p:txBody>
+          <a:bodyPr wrap="square" rtlCol="0">
+            <a:spAutoFit/>
+          </a:bodyPr>
+          <a:lstStyle/>
+          <a:p>
+            <a:r>
+              <a:rPr lang="de-DE" sz="1200" b="1">
+                <a:solidFill>
+                  <a:schemeClr val="accent4"/>
+                </a:solidFill>
+              </a:rPr>
+              <a:t>Temporal</a:t>
+            </a:r>
+          </a:p>
+        </p:txBody>
+      </p:sp>
+      <p:sp>
+        <p:nvSpPr>
+          <p:cNvPr id="31" name="Textfeld 30">
+            <a:extLst>
+              <a:ext uri="{FF2B5EF4-FFF2-40B4-BE49-F238E27FC236}">
+                <a16:creationId xmlns:a16="http://schemas.microsoft.com/office/drawing/2014/main" id="{9215938A-0D11-297F-F86B-10C475B9C836}"/>
+              </a:ext>
+            </a:extLst>
+          </p:cNvPr>
+          <p:cNvSpPr txBox="1"/>
+          <p:nvPr/>
+        </p:nvSpPr>
+        <p:spPr>
+          <a:xfrm>
+            <a:off x="9175243" y="4222922"/>
+            <a:ext cx="1102659" cy="276999"/>
+          </a:xfrm>
+          <a:prstGeom prst="rect">
+            <a:avLst/>
+          </a:prstGeom>
+          <a:noFill/>
+        </p:spPr>
+        <p:txBody>
+          <a:bodyPr wrap="square" rtlCol="0">
+            <a:spAutoFit/>
+          </a:bodyPr>
+          <a:lstStyle/>
+          <a:p>
+            <a:r>
+              <a:rPr lang="de-DE" sz="1200" b="1">
+                <a:solidFill>
+                  <a:schemeClr val="accent2"/>
+                </a:solidFill>
+              </a:rPr>
+              <a:t>LiteLLM</a:t>
             </a:r>
           </a:p>
         </p:txBody>
